--- a/docs/lecture-1/Лекция-1-Вводная.pptx
+++ b/docs/lecture-1/Лекция-1-Вводная.pptx
@@ -13449,7 +13449,7 @@
                 </a:solidFill>
                 <a:latin typeface="Geist"/>
               </a:rPr>
-              <a:t>GitHub-вход: шаг 1 — OAuth App</a:t>
+              <a:t>Вход через GitHub</a:t>
             </a:r>
           </a:p>
         </p:txBody>
@@ -13484,7 +13484,7 @@
                 </a:solidFill>
                 <a:latin typeface="Geist"/>
               </a:rPr>
-              <a:t>Регистрируем приложение в GitHub (сделаем прямо на лекции).</a:t>
+              <a:t>Никаких паролей и токенов вручную. Один аккаунт GitHub — и портал, и CLI.</a:t>
             </a:r>
           </a:p>
         </p:txBody>
@@ -13668,7 +13668,7 @@
                 </a:solidFill>
                 <a:latin typeface="JetBrains Mono"/>
               </a:rPr>
-              <a:t>GITHUB → SETTINGS → DEVELOPER</a:t>
+              <a:t>КАК ВОЙТИ (2 ПУТИ)</a:t>
             </a:r>
           </a:p>
         </p:txBody>
@@ -13682,7 +13682,7 @@
         <p:spPr>
           <a:xfrm>
             <a:off x="822960" y="2788920"/>
-            <a:ext cx="6309360" cy="3108960"/>
+            <a:ext cx="6309360" cy="3291840"/>
           </a:xfrm>
           <a:prstGeom prst="rect">
             <a:avLst/>
@@ -13702,7 +13702,7 @@
                 </a:solidFill>
                 <a:latin typeface="JetBrains Mono"/>
               </a:rPr>
-              <a:t>1  </a:t>
+              <a:t>A  </a:t>
             </a:r>
             <a:r>
               <a:rPr sz="1200" b="0">
@@ -13711,7 +13711,8 @@
                 </a:solidFill>
                 <a:latin typeface="Geist"/>
               </a:rPr>
-              <a:t>Settings → Developer settings → OAuth Apps → New</a:t>
+              <a:t>Портал: открой engineer-ai.pro →
+    «Продолжить с GitHub».</a:t>
             </a:r>
           </a:p>
           <a:p>
@@ -13727,7 +13728,7 @@
                 </a:solidFill>
                 <a:latin typeface="JetBrains Mono"/>
               </a:rPr>
-              <a:t>2  </a:t>
+              <a:t>B  </a:t>
             </a:r>
             <a:r>
               <a:rPr sz="1200" b="0">
@@ -13736,7 +13737,7 @@
                 </a:solidFill>
                 <a:latin typeface="Geist"/>
               </a:rPr>
-              <a:t>Application name: AI Product Engineer</a:t>
+              <a:t>CLI: набери  ape login  → откроется браузер.</a:t>
             </a:r>
           </a:p>
           <a:p>
@@ -13752,7 +13753,7 @@
                 </a:solidFill>
                 <a:latin typeface="JetBrains Mono"/>
               </a:rPr>
-              <a:t>3  </a:t>
+              <a:t>1  </a:t>
             </a:r>
             <a:r>
               <a:rPr sz="1200" b="0">
@@ -13761,7 +13762,8 @@
                 </a:solidFill>
                 <a:latin typeface="Geist"/>
               </a:rPr>
-              <a:t>Homepage URL: https://engineer-ai.pro</a:t>
+              <a:t>Нажми «Continue with GitHub» и подтверди доступ
+    (в первый раз GitHub спросит разрешение).</a:t>
             </a:r>
           </a:p>
           <a:p>
@@ -13777,7 +13779,7 @@
                 </a:solidFill>
                 <a:latin typeface="JetBrains Mono"/>
               </a:rPr>
-              <a:t>4  </a:t>
+              <a:t>2  </a:t>
             </a:r>
             <a:r>
               <a:rPr sz="1200" b="0">
@@ -13786,7 +13788,7 @@
                 </a:solidFill>
                 <a:latin typeface="Geist"/>
               </a:rPr>
-              <a:t>Authorization callback URL — см. справа →</a:t>
+              <a:t>Готово: вернёшься в портал / терминал уже внутри.</a:t>
             </a:r>
           </a:p>
           <a:p>
@@ -13802,7 +13804,7 @@
                 </a:solidFill>
                 <a:latin typeface="JetBrains Mono"/>
               </a:rPr>
-              <a:t>5  </a:t>
+              <a:t>3  </a:t>
             </a:r>
             <a:r>
               <a:rPr sz="1200" b="0">
@@ -13811,32 +13813,8 @@
                 </a:solidFill>
                 <a:latin typeface="Geist"/>
               </a:rPr>
-              <a:t>Register → скопируй Client ID</a:t>
-            </a:r>
-          </a:p>
-          <a:p>
-            <a:pPr>
-              <a:spcAft>
-                <a:spcPts val="800"/>
-              </a:spcAft>
-            </a:pPr>
-            <a:r>
-              <a:rPr sz="1300" b="1">
-                <a:solidFill>
-                  <a:srgbClr val="5B8CFF"/>
-                </a:solidFill>
-                <a:latin typeface="JetBrains Mono"/>
-              </a:rPr>
-              <a:t>6  </a:t>
-            </a:r>
-            <a:r>
-              <a:rPr sz="1200" b="0">
-                <a:solidFill>
-                  <a:srgbClr val="E6EDF3"/>
-                </a:solidFill>
-                <a:latin typeface="Geist"/>
-              </a:rPr>
-              <a:t>Generate client secret → скопируй (покажут раз)</a:t>
+              <a:t>Токен сохраняется и обновляется сам —
+    копировать ничего не нужно.</a:t>
             </a:r>
           </a:p>
         </p:txBody>
@@ -13917,7 +13895,7 @@
                 </a:solidFill>
                 <a:latin typeface="JetBrains Mono"/>
               </a:rPr>
-              <a:t>CALLBACK URL (1-В-1!)</a:t>
+              <a:t>ЧТО ДАЛЬШЕ</a:t>
             </a:r>
           </a:p>
         </p:txBody>
@@ -13931,7 +13909,7 @@
         <p:spPr>
           <a:xfrm>
             <a:off x="7863840" y="2834640"/>
-            <a:ext cx="3520440" cy="1280160"/>
+            <a:ext cx="3520440" cy="2926080"/>
           </a:xfrm>
           <a:prstGeom prst="rect">
             <a:avLst/>
@@ -13944,51 +13922,98 @@
           </a:bodyPr>
           <a:lstStyle/>
           <a:p>
-            <a:pPr algn="l"/>
-            <a:r>
-              <a:rPr sz="1100" b="1">
+            <a:r>
+              <a:rPr sz="1200" b="1">
                 <a:solidFill>
                   <a:srgbClr val="5B8CFF"/>
                 </a:solidFill>
                 <a:latin typeface="JetBrains Mono"/>
               </a:rPr>
-              <a:t>https://auth.engineer-ai.pro/realms/
-ai-product-engineer/broker/github/endpoint</a:t>
-            </a:r>
-          </a:p>
-        </p:txBody>
-      </p:sp>
-      <p:sp>
-        <p:nvSpPr>
-          <p:cNvPr id="13" name="TextBox 12"/>
-          <p:cNvSpPr txBox="1"/>
-          <p:nvPr/>
-        </p:nvSpPr>
-        <p:spPr>
-          <a:xfrm>
-            <a:off x="7863840" y="4754880"/>
-            <a:ext cx="3520440" cy="1097280"/>
-          </a:xfrm>
-          <a:prstGeom prst="rect">
-            <a:avLst/>
-          </a:prstGeom>
-          <a:noFill/>
-        </p:spPr>
-        <p:txBody>
-          <a:bodyPr wrap="square">
-            <a:spAutoFit/>
-          </a:bodyPr>
-          <a:lstStyle/>
-          <a:p>
-            <a:pPr algn="l"/>
-            <a:r>
-              <a:rPr sz="1100" b="0">
-                <a:solidFill>
-                  <a:srgbClr val="8B98A5"/>
+              <a:t>› </a:t>
+            </a:r>
+            <a:r>
+              <a:rPr sz="1150" b="0">
+                <a:solidFill>
+                  <a:srgbClr val="E6EDF3"/>
                 </a:solidFill>
                 <a:latin typeface="Geist"/>
               </a:rPr>
-              <a:t>Должен совпасть символ-в-символ — самая частая ошибка.</a:t>
+              <a:t>Роль student выдаётся автоматически</a:t>
+            </a:r>
+          </a:p>
+          <a:p>
+            <a:pPr>
+              <a:spcAft>
+                <a:spcPts val="1000"/>
+              </a:spcAft>
+            </a:pPr>
+            <a:r>
+              <a:rPr sz="1200" b="1">
+                <a:solidFill>
+                  <a:srgbClr val="5B8CFF"/>
+                </a:solidFill>
+                <a:latin typeface="JetBrains Mono"/>
+              </a:rPr>
+              <a:t>› </a:t>
+            </a:r>
+            <a:r>
+              <a:rPr sz="1150" b="0">
+                <a:solidFill>
+                  <a:srgbClr val="E6EDF3"/>
+                </a:solidFill>
+                <a:latin typeface="Geist"/>
+              </a:rPr>
+              <a:t>Один вход — доступ к моделям, RAG и квоте</a:t>
+            </a:r>
+          </a:p>
+          <a:p>
+            <a:pPr>
+              <a:spcAft>
+                <a:spcPts val="1000"/>
+              </a:spcAft>
+            </a:pPr>
+            <a:r>
+              <a:rPr sz="1200" b="1">
+                <a:solidFill>
+                  <a:srgbClr val="5B8CFF"/>
+                </a:solidFill>
+                <a:latin typeface="JetBrains Mono"/>
+              </a:rPr>
+              <a:t>› </a:t>
+            </a:r>
+            <a:r>
+              <a:rPr sz="1150" b="0">
+                <a:solidFill>
+                  <a:srgbClr val="E6EDF3"/>
+                </a:solidFill>
+                <a:latin typeface="Geist"/>
+              </a:rPr>
+              <a:t>В CLI: ape code / ape ask</a:t>
+            </a:r>
+          </a:p>
+          <a:p>
+            <a:pPr>
+              <a:spcAft>
+                <a:spcPts val="1000"/>
+              </a:spcAft>
+            </a:pPr>
+            <a:r>
+              <a:rPr sz="1200" b="1">
+                <a:solidFill>
+                  <a:srgbClr val="5B8CFF"/>
+                </a:solidFill>
+                <a:latin typeface="JetBrains Mono"/>
+              </a:rPr>
+              <a:t>› </a:t>
+            </a:r>
+            <a:r>
+              <a:rPr sz="1150" b="0">
+                <a:solidFill>
+                  <a:srgbClr val="E6EDF3"/>
+                </a:solidFill>
+                <a:latin typeface="Geist"/>
+              </a:rPr>
+              <a:t>401 «сессия истекла» → просто ape login заново</a:t>
             </a:r>
           </a:p>
         </p:txBody>
@@ -14049,7 +14074,7 @@
                 </a:solidFill>
                 <a:latin typeface="Geist"/>
               </a:rPr>
-              <a:t>GitHub-вход: шаг 2 — Keycloak</a:t>
+              <a:t>Настройка входа · для лектора</a:t>
             </a:r>
           </a:p>
         </p:txBody>
@@ -14084,7 +14109,7 @@
                 </a:solidFill>
                 <a:latin typeface="Geist"/>
               </a:rPr>
-              <a:t>Добавляем GitHub как Identity Provider в realm.</a:t>
+              <a:t>Разовая настройка GitHub-входа. Студентам этот слайд не нужен.</a:t>
             </a:r>
           </a:p>
         </p:txBody>
@@ -14196,14 +14221,49 @@
       </p:sp>
       <p:sp>
         <p:nvSpPr>
-          <p:cNvPr id="7" name="Rounded Rectangle 6"/>
+          <p:cNvPr id="7" name="TextBox 6"/>
+          <p:cNvSpPr txBox="1"/>
+          <p:nvPr/>
+        </p:nvSpPr>
+        <p:spPr>
+          <a:xfrm>
+            <a:off x="548640" y="1828800"/>
+            <a:ext cx="11064240" cy="274320"/>
+          </a:xfrm>
+          <a:prstGeom prst="rect">
+            <a:avLst/>
+          </a:prstGeom>
+          <a:noFill/>
+        </p:spPr>
+        <p:txBody>
+          <a:bodyPr wrap="square">
+            <a:spAutoFit/>
+          </a:bodyPr>
+          <a:lstStyle/>
+          <a:p>
+            <a:pPr algn="l"/>
+            <a:r>
+              <a:rPr sz="1050" b="1">
+                <a:solidFill>
+                  <a:srgbClr val="5B8CFF"/>
+                </a:solidFill>
+                <a:latin typeface="JetBrains Mono"/>
+              </a:rPr>
+              <a:t>ДЕЛАЕТСЯ ОДИН РАЗ ПРИ РАЗВЁРТЫВАНИИ КУРСА</a:t>
+            </a:r>
+          </a:p>
+        </p:txBody>
+      </p:sp>
+      <p:sp>
+        <p:nvSpPr>
+          <p:cNvPr id="8" name="Rounded Rectangle 7"/>
           <p:cNvSpPr/>
           <p:nvPr/>
         </p:nvSpPr>
         <p:spPr>
           <a:xfrm>
-            <a:off x="548640" y="2011680"/>
-            <a:ext cx="6766560" cy="4114800"/>
+            <a:off x="548640" y="2194560"/>
+            <a:ext cx="5486400" cy="3749039"/>
           </a:xfrm>
           <a:prstGeom prst="roundRect">
             <a:avLst/>
@@ -14211,8 +14271,10 @@
           <a:solidFill>
             <a:srgbClr val="121821"/>
           </a:solidFill>
-          <a:ln>
-            <a:noFill/>
+          <a:ln w="12700">
+            <a:solidFill>
+              <a:srgbClr val="1F2A3A"/>
+            </a:solidFill>
           </a:ln>
           <a:effectLst/>
         </p:spPr>
@@ -14240,14 +14302,14 @@
       </p:sp>
       <p:sp>
         <p:nvSpPr>
-          <p:cNvPr id="8" name="TextBox 7"/>
-          <p:cNvSpPr txBox="1"/>
-          <p:nvPr/>
-        </p:nvSpPr>
-        <p:spPr>
-          <a:xfrm>
-            <a:off x="822960" y="2240280"/>
-            <a:ext cx="6217920" cy="274320"/>
+          <p:cNvPr id="9" name="TextBox 8"/>
+          <p:cNvSpPr txBox="1"/>
+          <p:nvPr/>
+        </p:nvSpPr>
+        <p:spPr>
+          <a:xfrm>
+            <a:off x="822960" y="2423160"/>
+            <a:ext cx="4937760" cy="274320"/>
           </a:xfrm>
           <a:prstGeom prst="rect">
             <a:avLst/>
@@ -14268,21 +14330,21 @@
                 </a:solidFill>
                 <a:latin typeface="JetBrains Mono"/>
               </a:rPr>
-              <a:t>AUTH.ENGINEER-AI.PRO/ADMIN</a:t>
-            </a:r>
-          </a:p>
-        </p:txBody>
-      </p:sp>
-      <p:sp>
-        <p:nvSpPr>
-          <p:cNvPr id="9" name="TextBox 8"/>
-          <p:cNvSpPr txBox="1"/>
-          <p:nvPr/>
-        </p:nvSpPr>
-        <p:spPr>
-          <a:xfrm>
-            <a:off x="822960" y="2788920"/>
-            <a:ext cx="6309360" cy="3108960"/>
+              <a:t>1. GITHUB OAUTH APP</a:t>
+            </a:r>
+          </a:p>
+        </p:txBody>
+      </p:sp>
+      <p:sp>
+        <p:nvSpPr>
+          <p:cNvPr id="10" name="TextBox 9"/>
+          <p:cNvSpPr txBox="1"/>
+          <p:nvPr/>
+        </p:nvSpPr>
+        <p:spPr>
+          <a:xfrm>
+            <a:off x="822960" y="2971800"/>
+            <a:ext cx="5029200" cy="2834640"/>
           </a:xfrm>
           <a:prstGeom prst="rect">
             <a:avLst/>
@@ -14296,161 +14358,147 @@
           <a:lstStyle/>
           <a:p>
             <a:r>
-              <a:rPr sz="1300" b="1">
+              <a:rPr sz="1150" b="1">
                 <a:solidFill>
                   <a:srgbClr val="5B8CFF"/>
                 </a:solidFill>
                 <a:latin typeface="JetBrains Mono"/>
               </a:rPr>
-              <a:t>1  </a:t>
-            </a:r>
-            <a:r>
-              <a:rPr sz="1200" b="0">
+              <a:t>› </a:t>
+            </a:r>
+            <a:r>
+              <a:rPr sz="1150" b="0">
                 <a:solidFill>
                   <a:srgbClr val="E6EDF3"/>
                 </a:solidFill>
                 <a:latin typeface="Geist"/>
               </a:rPr>
-              <a:t>Войди admin → выбери realm ai-product-engineer</a:t>
+              <a:t>Settings → Developer settings → OAuth Apps → New</a:t>
             </a:r>
           </a:p>
           <a:p>
             <a:pPr>
               <a:spcAft>
-                <a:spcPts val="800"/>
+                <a:spcPts val="900"/>
               </a:spcAft>
             </a:pPr>
             <a:r>
-              <a:rPr sz="1300" b="1">
+              <a:rPr sz="1150" b="1">
                 <a:solidFill>
                   <a:srgbClr val="5B8CFF"/>
                 </a:solidFill>
                 <a:latin typeface="JetBrains Mono"/>
               </a:rPr>
-              <a:t>2  </a:t>
-            </a:r>
-            <a:r>
-              <a:rPr sz="1200" b="0">
+              <a:t>› </a:t>
+            </a:r>
+            <a:r>
+              <a:rPr sz="1150" b="0">
                 <a:solidFill>
                   <a:srgbClr val="E6EDF3"/>
                 </a:solidFill>
                 <a:latin typeface="Geist"/>
               </a:rPr>
-              <a:t>Identity providers → Add provider → GitHub</a:t>
+              <a:t>Homepage: https://engineer-ai.pro</a:t>
             </a:r>
           </a:p>
           <a:p>
             <a:pPr>
               <a:spcAft>
-                <a:spcPts val="800"/>
+                <a:spcPts val="900"/>
               </a:spcAft>
             </a:pPr>
             <a:r>
-              <a:rPr sz="1300" b="1">
+              <a:rPr sz="1150" b="1">
                 <a:solidFill>
                   <a:srgbClr val="5B8CFF"/>
                 </a:solidFill>
                 <a:latin typeface="JetBrains Mono"/>
               </a:rPr>
-              <a:t>3  </a:t>
-            </a:r>
-            <a:r>
-              <a:rPr sz="1200" b="0">
+              <a:t>› </a:t>
+            </a:r>
+            <a:r>
+              <a:rPr sz="1150" b="0">
                 <a:solidFill>
                   <a:srgbClr val="E6EDF3"/>
                 </a:solidFill>
                 <a:latin typeface="Geist"/>
               </a:rPr>
-              <a:t>Вставь Client ID и Client Secret из шага 1</a:t>
+              <a:t>Authorization callback URL — см. ниже (1-в-1!)</a:t>
             </a:r>
           </a:p>
           <a:p>
             <a:pPr>
               <a:spcAft>
-                <a:spcPts val="800"/>
+                <a:spcPts val="900"/>
               </a:spcAft>
             </a:pPr>
             <a:r>
-              <a:rPr sz="1300" b="1">
+              <a:rPr sz="1150" b="1">
                 <a:solidFill>
                   <a:srgbClr val="5B8CFF"/>
                 </a:solidFill>
                 <a:latin typeface="JetBrains Mono"/>
               </a:rPr>
-              <a:t>4  </a:t>
-            </a:r>
-            <a:r>
-              <a:rPr sz="1200" b="0">
+              <a:t>› </a:t>
+            </a:r>
+            <a:r>
+              <a:rPr sz="1150" b="0">
                 <a:solidFill>
                   <a:srgbClr val="E6EDF3"/>
                 </a:solidFill>
                 <a:latin typeface="Geist"/>
               </a:rPr>
-              <a:t>Save</a:t>
-            </a:r>
-          </a:p>
-          <a:p>
-            <a:pPr>
-              <a:spcAft>
-                <a:spcPts val="800"/>
-              </a:spcAft>
-            </a:pPr>
-            <a:r>
-              <a:rPr sz="1300" b="1">
+              <a:t>Register → Client ID + Generate client secret</a:t>
+            </a:r>
+          </a:p>
+        </p:txBody>
+      </p:sp>
+      <p:sp>
+        <p:nvSpPr>
+          <p:cNvPr id="11" name="TextBox 10"/>
+          <p:cNvSpPr txBox="1"/>
+          <p:nvPr/>
+        </p:nvSpPr>
+        <p:spPr>
+          <a:xfrm>
+            <a:off x="822960" y="5394960"/>
+            <a:ext cx="4937760" cy="457200"/>
+          </a:xfrm>
+          <a:prstGeom prst="rect">
+            <a:avLst/>
+          </a:prstGeom>
+          <a:noFill/>
+        </p:spPr>
+        <p:txBody>
+          <a:bodyPr wrap="square">
+            <a:spAutoFit/>
+          </a:bodyPr>
+          <a:lstStyle/>
+          <a:p>
+            <a:pPr algn="l"/>
+            <a:r>
+              <a:rPr sz="950" b="1">
                 <a:solidFill>
                   <a:srgbClr val="5B8CFF"/>
                 </a:solidFill>
                 <a:latin typeface="JetBrains Mono"/>
               </a:rPr>
-              <a:t>5  </a:t>
-            </a:r>
-            <a:r>
-              <a:rPr sz="1200" b="0">
-                <a:solidFill>
-                  <a:srgbClr val="E6EDF3"/>
-                </a:solidFill>
-                <a:latin typeface="Geist"/>
-              </a:rPr>
-              <a:t>Роль student назначится автоматически (default)</a:t>
-            </a:r>
-          </a:p>
-          <a:p>
-            <a:pPr>
-              <a:spcAft>
-                <a:spcPts val="800"/>
-              </a:spcAft>
-            </a:pPr>
-            <a:r>
-              <a:rPr sz="1300" b="1">
-                <a:solidFill>
-                  <a:srgbClr val="5B8CFF"/>
-                </a:solidFill>
-                <a:latin typeface="JetBrains Mono"/>
-              </a:rPr>
-              <a:t>6  </a:t>
-            </a:r>
-            <a:r>
-              <a:rPr sz="1200" b="0">
-                <a:solidFill>
-                  <a:srgbClr val="E6EDF3"/>
-                </a:solidFill>
-                <a:latin typeface="Geist"/>
-              </a:rPr>
-              <a:t>Проверка: Account → Sign in → кнопка GitHub → вход</a:t>
-            </a:r>
-          </a:p>
-        </p:txBody>
-      </p:sp>
-      <p:sp>
-        <p:nvSpPr>
-          <p:cNvPr id="10" name="Rounded Rectangle 9"/>
+              <a:t>https://auth.engineer-ai.pro/realms/
+ai-product-engineer/broker/github/endpoint</a:t>
+            </a:r>
+          </a:p>
+        </p:txBody>
+      </p:sp>
+      <p:sp>
+        <p:nvSpPr>
+          <p:cNvPr id="12" name="Rounded Rectangle 11"/>
           <p:cNvSpPr/>
           <p:nvPr/>
         </p:nvSpPr>
         <p:spPr>
           <a:xfrm>
-            <a:off x="7635240" y="2011680"/>
-            <a:ext cx="3977639" cy="4114800"/>
+            <a:off x="6153912" y="2194560"/>
+            <a:ext cx="5486400" cy="3749039"/>
           </a:xfrm>
           <a:prstGeom prst="roundRect">
             <a:avLst/>
@@ -14489,14 +14537,14 @@
       </p:sp>
       <p:sp>
         <p:nvSpPr>
-          <p:cNvPr id="11" name="TextBox 10"/>
-          <p:cNvSpPr txBox="1"/>
-          <p:nvPr/>
-        </p:nvSpPr>
-        <p:spPr>
-          <a:xfrm>
-            <a:off x="7863840" y="2240280"/>
-            <a:ext cx="3566160" cy="274320"/>
+          <p:cNvPr id="13" name="TextBox 12"/>
+          <p:cNvSpPr txBox="1"/>
+          <p:nvPr/>
+        </p:nvSpPr>
+        <p:spPr>
+          <a:xfrm>
+            <a:off x="6428232" y="2423160"/>
+            <a:ext cx="4937760" cy="274320"/>
           </a:xfrm>
           <a:prstGeom prst="rect">
             <a:avLst/>
@@ -14517,21 +14565,21 @@
                 </a:solidFill>
                 <a:latin typeface="JetBrains Mono"/>
               </a:rPr>
-              <a:t>ЧТО ПОЛУЧАЕМ</a:t>
-            </a:r>
-          </a:p>
-        </p:txBody>
-      </p:sp>
-      <p:sp>
-        <p:nvSpPr>
-          <p:cNvPr id="12" name="TextBox 11"/>
-          <p:cNvSpPr txBox="1"/>
-          <p:nvPr/>
-        </p:nvSpPr>
-        <p:spPr>
-          <a:xfrm>
-            <a:off x="7863840" y="2834640"/>
-            <a:ext cx="3520440" cy="2926080"/>
+              <a:t>2. KEYCLOAK · IDENTITY PROVIDER</a:t>
+            </a:r>
+          </a:p>
+        </p:txBody>
+      </p:sp>
+      <p:sp>
+        <p:nvSpPr>
+          <p:cNvPr id="14" name="TextBox 13"/>
+          <p:cNvSpPr txBox="1"/>
+          <p:nvPr/>
+        </p:nvSpPr>
+        <p:spPr>
+          <a:xfrm>
+            <a:off x="6428232" y="2971800"/>
+            <a:ext cx="5029200" cy="2834640"/>
           </a:xfrm>
           <a:prstGeom prst="rect">
             <a:avLst/>
@@ -14545,7 +14593,7 @@
           <a:lstStyle/>
           <a:p>
             <a:r>
-              <a:rPr sz="1200" b="1">
+              <a:rPr sz="1150" b="1">
                 <a:solidFill>
                   <a:srgbClr val="5B8CFF"/>
                 </a:solidFill>
@@ -14560,17 +14608,17 @@
                 </a:solidFill>
                 <a:latin typeface="Geist"/>
               </a:rPr>
-              <a:t>Студент входит по GitHub, без паролей</a:t>
+              <a:t>auth.engineer-ai.pro/admin → realm ai-product-engineer</a:t>
             </a:r>
           </a:p>
           <a:p>
             <a:pPr>
               <a:spcAft>
-                <a:spcPts val="1000"/>
+                <a:spcPts val="900"/>
               </a:spcAft>
             </a:pPr>
             <a:r>
-              <a:rPr sz="1200" b="1">
+              <a:rPr sz="1150" b="1">
                 <a:solidFill>
                   <a:srgbClr val="5B8CFF"/>
                 </a:solidFill>
@@ -14585,17 +14633,17 @@
                 </a:solidFill>
                 <a:latin typeface="Geist"/>
               </a:rPr>
-              <a:t>Keycloak выдаёт JWT (aud=course-mcp)</a:t>
+              <a:t>Identity providers → Add → GitHub</a:t>
             </a:r>
           </a:p>
           <a:p>
             <a:pPr>
               <a:spcAft>
-                <a:spcPts val="1000"/>
+                <a:spcPts val="900"/>
               </a:spcAft>
             </a:pPr>
             <a:r>
-              <a:rPr sz="1200" b="1">
+              <a:rPr sz="1150" b="1">
                 <a:solidFill>
                   <a:srgbClr val="5B8CFF"/>
                 </a:solidFill>
@@ -14610,17 +14658,17 @@
                 </a:solidFill>
                 <a:latin typeface="Geist"/>
               </a:rPr>
-              <a:t>MCP валидирует его по JWKS</a:t>
+              <a:t>Вставь Client ID и Client Secret → Save</a:t>
             </a:r>
           </a:p>
           <a:p>
             <a:pPr>
               <a:spcAft>
-                <a:spcPts val="1000"/>
+                <a:spcPts val="900"/>
               </a:spcAft>
             </a:pPr>
             <a:r>
-              <a:rPr sz="1200" b="1">
+              <a:rPr sz="1150" b="1">
                 <a:solidFill>
                   <a:srgbClr val="5B8CFF"/>
                 </a:solidFill>
@@ -14635,8 +14683,32 @@
                 </a:solidFill>
                 <a:latin typeface="Geist"/>
               </a:rPr>
-              <a:t>Это и есть кнопка «Продолжить с GitHub»
-из window.Auth портала</a:t>
+              <a:t>Роль student — default, выдаётся сама</a:t>
+            </a:r>
+          </a:p>
+          <a:p>
+            <a:pPr>
+              <a:spcAft>
+                <a:spcPts val="900"/>
+              </a:spcAft>
+            </a:pPr>
+            <a:r>
+              <a:rPr sz="1150" b="1">
+                <a:solidFill>
+                  <a:srgbClr val="5B8CFF"/>
+                </a:solidFill>
+                <a:latin typeface="JetBrains Mono"/>
+              </a:rPr>
+              <a:t>› </a:t>
+            </a:r>
+            <a:r>
+              <a:rPr sz="1150" b="0">
+                <a:solidFill>
+                  <a:srgbClr val="E6EDF3"/>
+                </a:solidFill>
+                <a:latin typeface="Geist"/>
+              </a:rPr>
+              <a:t>Проверка: Account → Sign in → GitHub</a:t>
             </a:r>
           </a:p>
         </p:txBody>

--- a/docs/lecture-1/Лекция-1-Вводная.pptx
+++ b/docs/lecture-1/Лекция-1-Вводная.pptx
@@ -4883,7 +4883,7 @@
                 <a:ea typeface="Arial" pitchFamily="34" charset="-122"/>
                 <a:cs typeface="Arial" pitchFamily="34" charset="-120"/>
               </a:rPr>
-              <a:t>Наш рабочий инструмент — CLI-агенты</a:t>
+              <a:t>CLI-агенты: наша экосистема</a:t>
             </a:r>
             <a:endParaRPr lang="en-US" sz="2700" dirty="0"/>
           </a:p>
@@ -5740,7 +5740,7 @@
                 <a:ea typeface="Arial" pitchFamily="34" charset="-122"/>
                 <a:cs typeface="Arial" pitchFamily="34" charset="-120"/>
               </a:rPr>
-              <a:t>Сегодня вечером поставим и попробуем каждый на живом примере. Выберете тот, что зайдёт вам.</a:t>
+              <a:t>Старт курса — свой CLI ape (ставится за минуту). Эти агенты подключим к тому же MCP-шлюзу позже.</a:t>
             </a:r>
             <a:endParaRPr lang="en-US" sz="1350" dirty="0"/>
           </a:p>
@@ -6475,7 +6475,7 @@
                 <a:ea typeface="Arial" pitchFamily="34" charset="-122"/>
                 <a:cs typeface="Arial" pitchFamily="34" charset="-120"/>
               </a:rPr>
-              <a:t>Qwen, DeepSeek, Gemini + модели ПИШ</a:t>
+              <a:t>Qwen, DeepSeek, Claude, Kimi (каскад RouteAI)</a:t>
             </a:r>
             <a:endParaRPr lang="en-US" sz="1050" dirty="0"/>
           </a:p>
@@ -9230,7 +9230,7 @@
                 <a:ea typeface="Arial" pitchFamily="34" charset="-122"/>
                 <a:cs typeface="Arial" pitchFamily="34" charset="-120"/>
               </a:rPr>
-              <a:t>Claude Code / Cursor / Kimi CLI / DeepSeek — пробуем на живом примере</a:t>
+              <a:t>Свой CLI курса: pip install engineer-ai-cli → ape login</a:t>
             </a:r>
             <a:endParaRPr lang="en-US" sz="1250" dirty="0"/>
           </a:p>
@@ -9400,7 +9400,7 @@
                 <a:ea typeface="Arial" pitchFamily="34" charset="-122"/>
                 <a:cs typeface="Arial" pitchFamily="34" charset="-120"/>
               </a:rPr>
-              <a:t>JWT-доступ к курсовому MCP, первый запрос, проверяем cost-журнал</a:t>
+              <a:t>ape code «…» — первый вызов, проверяем cost-журнал</a:t>
             </a:r>
             <a:endParaRPr lang="en-US" sz="1250" dirty="0"/>
           </a:p>
@@ -9964,7 +9964,7 @@
                 <a:ea typeface="Arial" pitchFamily="34" charset="-122"/>
                 <a:cs typeface="Arial" pitchFamily="34" charset="-120"/>
               </a:rPr>
-              <a:t>19</a:t>
+              <a:t>27</a:t>
             </a:r>
             <a:endParaRPr lang="en-US" sz="900" dirty="0"/>
           </a:p>
@@ -16591,7 +16591,7 @@
                 </a:solidFill>
                 <a:latin typeface="Geist"/>
               </a:rPr>
-              <a:t>OpenCode / IDE как MCP-клиент</a:t>
+              <a:t>Агент (Claude Code / Cursor / …) как MCP-клиент</a:t>
             </a:r>
           </a:p>
           <a:p>
@@ -16902,7 +16902,7 @@
                 </a:solidFill>
                 <a:latin typeface="JetBrains Mono"/>
               </a:rPr>
-              <a:t>24</a:t>
+              <a:t>28</a:t>
             </a:r>
           </a:p>
         </p:txBody>
@@ -17743,7 +17743,7 @@
                 </a:solidFill>
                 <a:latin typeface="JetBrains Mono"/>
               </a:rPr>
-              <a:t>25</a:t>
+              <a:t>29</a:t>
             </a:r>
           </a:p>
         </p:txBody>
@@ -19069,7 +19069,7 @@
                 </a:solidFill>
                 <a:latin typeface="JetBrains Mono"/>
               </a:rPr>
-              <a:t>26</a:t>
+              <a:t>30</a:t>
             </a:r>
           </a:p>
         </p:txBody>
@@ -19703,7 +19703,7 @@
                 </a:solidFill>
                 <a:latin typeface="JetBrains Mono"/>
               </a:rPr>
-              <a:t>27</a:t>
+              <a:t>31</a:t>
             </a:r>
           </a:p>
         </p:txBody>
